--- a/presentation/AVM_발표_요약.pptx
+++ b/presentation/AVM_발표_요약.pptx
@@ -1939,7 +1939,7 @@
         <p:spPr>
           <a:xfrm>
             <a:off x="731520" y="3977640"/>
-            <a:ext cx="10058400" cy="365760"/>
+            <a:ext cx="11155680" cy="365760"/>
           </a:xfrm>
           <a:prstGeom prst="rect">
             <a:avLst/>
@@ -1966,7 +1966,7 @@
                 <a:ea typeface="Pretendard" pitchFamily="34" charset="-122"/>
                 <a:cs typeface="Pretendard" pitchFamily="34" charset="-120"/>
               </a:rPr>
-              <a:t>지번·층·호를 넣으면 시세·범위·신뢰도·근거를 산출합니다  |  강서구 화곡동 · 관악구 · 강남구  |  기준일 2026-10-06</a:t>
+              <a:t>지번·층·호를 넣으면 시세·범위·신뢰도·근거를 산출합니다  |  강서구 화곡동 · 관악구 · 강남구  |  기준일 2026-10-06(과제 안내일)</a:t>
             </a:r>
             <a:endParaRPr lang="ko-KR" altLang="en-US" sz="1600" dirty="0"/>
           </a:p>
@@ -1980,8 +1980,8 @@
         </p:nvSpPr>
         <p:spPr>
           <a:xfrm>
-            <a:off x="731520" y="5669280"/>
-            <a:ext cx="5486400" cy="365760"/>
+            <a:off x="731520" y="4526280"/>
+            <a:ext cx="2286000" cy="548640"/>
           </a:xfrm>
           <a:prstGeom prst="rect">
             <a:avLst/>
@@ -2000,6 +2000,342 @@
               <a:buNone/>
             </a:pPr>
             <a:r>
+              <a:rPr lang="ko-KR" altLang="en-US" sz="3000" b="1" dirty="0">
+                <a:solidFill>
+                  <a:srgbClr val="FFFFFF"/>
+                </a:solidFill>
+                <a:latin typeface="Pretendard" pitchFamily="34" charset="0"/>
+                <a:ea typeface="Pretendard" pitchFamily="34" charset="-122"/>
+                <a:cs typeface="Pretendard" pitchFamily="34" charset="-120"/>
+              </a:rPr>
+              <a:t>9%</a:t>
+            </a:r>
+            <a:endParaRPr lang="ko-KR" altLang="en-US" sz="3000" dirty="0"/>
+          </a:p>
+        </p:txBody>
+      </p:sp>
+      <p:sp>
+        <p:nvSpPr>
+          <p:cNvPr id="6" name="Text 4"/>
+          <p:cNvSpPr txBox="1"/>
+          <p:nvPr/>
+        </p:nvSpPr>
+        <p:spPr>
+          <a:xfrm>
+            <a:off x="731520" y="5074920"/>
+            <a:ext cx="2286000" cy="320040"/>
+          </a:xfrm>
+          <a:prstGeom prst="rect">
+            <a:avLst/>
+          </a:prstGeom>
+          <a:noFill/>
+          <a:ln/>
+        </p:spPr>
+        <p:txBody>
+          <a:bodyPr wrap="square" lIns="0" tIns="0" rIns="0" bIns="0" rtlCol="0" anchor="t"/>
+          <a:lstStyle/>
+          <a:p>
+            <a:pPr eaLnBrk="0" indent="0" marL="0">
+              <a:lnSpc>
+                <a:spcPct val="120000"/>
+              </a:lnSpc>
+              <a:buNone/>
+            </a:pPr>
+            <a:r>
+              <a:rPr lang="ko-KR" altLang="en-US" sz="1200" dirty="0">
+                <a:solidFill>
+                  <a:srgbClr val="C9D3E6"/>
+                </a:solidFill>
+                <a:latin typeface="Pretendard" pitchFamily="34" charset="0"/>
+                <a:ea typeface="Pretendard" pitchFamily="34" charset="-122"/>
+                <a:cs typeface="Pretendard" pitchFamily="34" charset="-120"/>
+              </a:rPr>
+              <a:t>실제 가격과의 보통 오차</a:t>
+            </a:r>
+            <a:endParaRPr lang="ko-KR" altLang="en-US" sz="1200" dirty="0"/>
+          </a:p>
+        </p:txBody>
+      </p:sp>
+      <p:sp>
+        <p:nvSpPr>
+          <p:cNvPr id="7" name="Text 5"/>
+          <p:cNvSpPr txBox="1"/>
+          <p:nvPr/>
+        </p:nvSpPr>
+        <p:spPr>
+          <a:xfrm>
+            <a:off x="3200400" y="4526280"/>
+            <a:ext cx="2286000" cy="548640"/>
+          </a:xfrm>
+          <a:prstGeom prst="rect">
+            <a:avLst/>
+          </a:prstGeom>
+          <a:noFill/>
+          <a:ln/>
+        </p:spPr>
+        <p:txBody>
+          <a:bodyPr wrap="square" lIns="0" tIns="0" rIns="0" bIns="0" rtlCol="0" anchor="t"/>
+          <a:lstStyle/>
+          <a:p>
+            <a:pPr eaLnBrk="0" indent="0" marL="0">
+              <a:lnSpc>
+                <a:spcPct val="120000"/>
+              </a:lnSpc>
+              <a:buNone/>
+            </a:pPr>
+            <a:r>
+              <a:rPr lang="ko-KR" altLang="en-US" sz="3000" b="1" dirty="0">
+                <a:solidFill>
+                  <a:srgbClr val="FFFFFF"/>
+                </a:solidFill>
+                <a:latin typeface="Pretendard" pitchFamily="34" charset="0"/>
+                <a:ea typeface="Pretendard" pitchFamily="34" charset="-122"/>
+                <a:cs typeface="Pretendard" pitchFamily="34" charset="-120"/>
+              </a:rPr>
+              <a:t>79%</a:t>
+            </a:r>
+            <a:endParaRPr lang="ko-KR" altLang="en-US" sz="3000" dirty="0"/>
+          </a:p>
+        </p:txBody>
+      </p:sp>
+      <p:sp>
+        <p:nvSpPr>
+          <p:cNvPr id="8" name="Text 6"/>
+          <p:cNvSpPr txBox="1"/>
+          <p:nvPr/>
+        </p:nvSpPr>
+        <p:spPr>
+          <a:xfrm>
+            <a:off x="3200400" y="5074920"/>
+            <a:ext cx="2286000" cy="320040"/>
+          </a:xfrm>
+          <a:prstGeom prst="rect">
+            <a:avLst/>
+          </a:prstGeom>
+          <a:noFill/>
+          <a:ln/>
+        </p:spPr>
+        <p:txBody>
+          <a:bodyPr wrap="square" lIns="0" tIns="0" rIns="0" bIns="0" rtlCol="0" anchor="t"/>
+          <a:lstStyle/>
+          <a:p>
+            <a:pPr eaLnBrk="0" indent="0" marL="0">
+              <a:lnSpc>
+                <a:spcPct val="120000"/>
+              </a:lnSpc>
+              <a:buNone/>
+            </a:pPr>
+            <a:r>
+              <a:rPr lang="ko-KR" altLang="en-US" sz="1200" dirty="0">
+                <a:solidFill>
+                  <a:srgbClr val="C9D3E6"/>
+                </a:solidFill>
+                <a:latin typeface="Pretendard" pitchFamily="34" charset="0"/>
+                <a:ea typeface="Pretendard" pitchFamily="34" charset="-122"/>
+                <a:cs typeface="Pretendard" pitchFamily="34" charset="-120"/>
+              </a:rPr>
+              <a:t>실제 가격 ±20% 안</a:t>
+            </a:r>
+            <a:endParaRPr lang="ko-KR" altLang="en-US" sz="1200" dirty="0"/>
+          </a:p>
+        </p:txBody>
+      </p:sp>
+      <p:sp>
+        <p:nvSpPr>
+          <p:cNvPr id="9" name="Text 7"/>
+          <p:cNvSpPr txBox="1"/>
+          <p:nvPr/>
+        </p:nvSpPr>
+        <p:spPr>
+          <a:xfrm>
+            <a:off x="5669280" y="4526280"/>
+            <a:ext cx="2286000" cy="548640"/>
+          </a:xfrm>
+          <a:prstGeom prst="rect">
+            <a:avLst/>
+          </a:prstGeom>
+          <a:noFill/>
+          <a:ln/>
+        </p:spPr>
+        <p:txBody>
+          <a:bodyPr wrap="square" lIns="0" tIns="0" rIns="0" bIns="0" rtlCol="0" anchor="t"/>
+          <a:lstStyle/>
+          <a:p>
+            <a:pPr eaLnBrk="0" indent="0" marL="0">
+              <a:lnSpc>
+                <a:spcPct val="120000"/>
+              </a:lnSpc>
+              <a:buNone/>
+            </a:pPr>
+            <a:r>
+              <a:rPr lang="ko-KR" altLang="en-US" sz="3000" b="1" dirty="0">
+                <a:solidFill>
+                  <a:srgbClr val="EB6834"/>
+                </a:solidFill>
+                <a:latin typeface="Pretendard" pitchFamily="34" charset="0"/>
+                <a:ea typeface="Pretendard" pitchFamily="34" charset="-122"/>
+                <a:cs typeface="Pretendard" pitchFamily="34" charset="-120"/>
+              </a:rPr>
+              <a:t>86%</a:t>
+            </a:r>
+            <a:endParaRPr lang="ko-KR" altLang="en-US" sz="3000" dirty="0"/>
+          </a:p>
+        </p:txBody>
+      </p:sp>
+      <p:sp>
+        <p:nvSpPr>
+          <p:cNvPr id="10" name="Text 8"/>
+          <p:cNvSpPr txBox="1"/>
+          <p:nvPr/>
+        </p:nvSpPr>
+        <p:spPr>
+          <a:xfrm>
+            <a:off x="5669280" y="5074920"/>
+            <a:ext cx="2286000" cy="320040"/>
+          </a:xfrm>
+          <a:prstGeom prst="rect">
+            <a:avLst/>
+          </a:prstGeom>
+          <a:noFill/>
+          <a:ln/>
+        </p:spPr>
+        <p:txBody>
+          <a:bodyPr wrap="square" lIns="0" tIns="0" rIns="0" bIns="0" rtlCol="0" anchor="t"/>
+          <a:lstStyle/>
+          <a:p>
+            <a:pPr eaLnBrk="0" indent="0" marL="0">
+              <a:lnSpc>
+                <a:spcPct val="120000"/>
+              </a:lnSpc>
+              <a:buNone/>
+            </a:pPr>
+            <a:r>
+              <a:rPr lang="ko-KR" altLang="en-US" sz="1200" dirty="0">
+                <a:solidFill>
+                  <a:srgbClr val="C9D3E6"/>
+                </a:solidFill>
+                <a:latin typeface="Pretendard" pitchFamily="34" charset="0"/>
+                <a:ea typeface="Pretendard" pitchFamily="34" charset="-122"/>
+                <a:cs typeface="Pretendard" pitchFamily="34" charset="-120"/>
+              </a:rPr>
+              <a:t>신뢰도 0.8 초과 물건 적중률</a:t>
+            </a:r>
+            <a:endParaRPr lang="ko-KR" altLang="en-US" sz="1200" dirty="0"/>
+          </a:p>
+        </p:txBody>
+      </p:sp>
+      <p:sp>
+        <p:nvSpPr>
+          <p:cNvPr id="11" name="Text 9"/>
+          <p:cNvSpPr txBox="1"/>
+          <p:nvPr/>
+        </p:nvSpPr>
+        <p:spPr>
+          <a:xfrm>
+            <a:off x="8138160" y="4526280"/>
+            <a:ext cx="2286000" cy="548640"/>
+          </a:xfrm>
+          <a:prstGeom prst="rect">
+            <a:avLst/>
+          </a:prstGeom>
+          <a:noFill/>
+          <a:ln/>
+        </p:spPr>
+        <p:txBody>
+          <a:bodyPr wrap="square" lIns="0" tIns="0" rIns="0" bIns="0" rtlCol="0" anchor="t"/>
+          <a:lstStyle/>
+          <a:p>
+            <a:pPr eaLnBrk="0" indent="0" marL="0">
+              <a:lnSpc>
+                <a:spcPct val="120000"/>
+              </a:lnSpc>
+              <a:buNone/>
+            </a:pPr>
+            <a:r>
+              <a:rPr lang="ko-KR" altLang="en-US" sz="3000" b="1" dirty="0">
+                <a:solidFill>
+                  <a:srgbClr val="FFFFFF"/>
+                </a:solidFill>
+                <a:latin typeface="Pretendard" pitchFamily="34" charset="0"/>
+                <a:ea typeface="Pretendard" pitchFamily="34" charset="-122"/>
+                <a:cs typeface="Pretendard" pitchFamily="34" charset="-120"/>
+              </a:rPr>
+              <a:t>0건</a:t>
+            </a:r>
+            <a:endParaRPr lang="ko-KR" altLang="en-US" sz="3000" dirty="0"/>
+          </a:p>
+        </p:txBody>
+      </p:sp>
+      <p:sp>
+        <p:nvSpPr>
+          <p:cNvPr id="12" name="Text 10"/>
+          <p:cNvSpPr txBox="1"/>
+          <p:nvPr/>
+        </p:nvSpPr>
+        <p:spPr>
+          <a:xfrm>
+            <a:off x="8138160" y="5074920"/>
+            <a:ext cx="2286000" cy="320040"/>
+          </a:xfrm>
+          <a:prstGeom prst="rect">
+            <a:avLst/>
+          </a:prstGeom>
+          <a:noFill/>
+          <a:ln/>
+        </p:spPr>
+        <p:txBody>
+          <a:bodyPr wrap="square" lIns="0" tIns="0" rIns="0" bIns="0" rtlCol="0" anchor="t"/>
+          <a:lstStyle/>
+          <a:p>
+            <a:pPr eaLnBrk="0" indent="0" marL="0">
+              <a:lnSpc>
+                <a:spcPct val="120000"/>
+              </a:lnSpc>
+              <a:buNone/>
+            </a:pPr>
+            <a:r>
+              <a:rPr lang="ko-KR" altLang="en-US" sz="1200" dirty="0">
+                <a:solidFill>
+                  <a:srgbClr val="C9D3E6"/>
+                </a:solidFill>
+                <a:latin typeface="Pretendard" pitchFamily="34" charset="0"/>
+                <a:ea typeface="Pretendard" pitchFamily="34" charset="-122"/>
+                <a:cs typeface="Pretendard" pitchFamily="34" charset="-120"/>
+              </a:rPr>
+              <a:t>표본 20건 실행 실패</a:t>
+            </a:r>
+            <a:endParaRPr lang="ko-KR" altLang="en-US" sz="1200" dirty="0"/>
+          </a:p>
+        </p:txBody>
+      </p:sp>
+      <p:sp>
+        <p:nvSpPr>
+          <p:cNvPr id="13" name="Text 11"/>
+          <p:cNvSpPr txBox="1"/>
+          <p:nvPr/>
+        </p:nvSpPr>
+        <p:spPr>
+          <a:xfrm>
+            <a:off x="731520" y="5669280"/>
+            <a:ext cx="5486400" cy="365760"/>
+          </a:xfrm>
+          <a:prstGeom prst="rect">
+            <a:avLst/>
+          </a:prstGeom>
+          <a:noFill/>
+          <a:ln/>
+        </p:spPr>
+        <p:txBody>
+          <a:bodyPr wrap="square" lIns="0" tIns="0" rIns="0" bIns="0" rtlCol="0" anchor="t"/>
+          <a:lstStyle/>
+          <a:p>
+            <a:pPr eaLnBrk="0" indent="0" marL="0">
+              <a:lnSpc>
+                <a:spcPct val="120000"/>
+              </a:lnSpc>
+              <a:buNone/>
+            </a:pPr>
+            <a:r>
               <a:rPr lang="ko-KR" altLang="en-US" sz="1600" dirty="0">
                 <a:solidFill>
                   <a:srgbClr val="FFFFFF"/>
@@ -2016,7 +2352,7 @@
       </p:sp>
       <p:sp>
         <p:nvSpPr>
-          <p:cNvPr id="6" name="Text 4"/>
+          <p:cNvPr id="14" name="Text 12"/>
           <p:cNvSpPr txBox="1"/>
           <p:nvPr/>
         </p:nvSpPr>
@@ -3370,7 +3706,7 @@
                 <a:ea typeface="Pretendard" pitchFamily="34" charset="-122"/>
                 <a:cs typeface="Pretendard" pitchFamily="34" charset="-120"/>
               </a:rPr>
-              <a:t>데이터마다 얻을 수 있는 정보입니다. 다세대와 연립을 모두 포함했습니다</a:t>
+              <a:t>건축물대장은 현행·말소, 코드는 법정동·행정동 각 2종이라 카드 6장에 8가지입니다. 다세대와 연립을 모두 포함했습니다</a:t>
             </a:r>
             <a:endParaRPr lang="ko-KR" altLang="en-US" sz="1500" dirty="0"/>
           </a:p>
@@ -3829,7 +4165,7 @@
                 <a:ea typeface="Pretendard" pitchFamily="34" charset="-122"/>
                 <a:cs typeface="Pretendard" pitchFamily="34" charset="-120"/>
               </a:rPr>
-              <a:t>9,928개 지번 + 말소 49,074건</a:t>
+              <a:t>9,928개 지번 + 말소 49,074지번</a:t>
             </a:r>
             <a:endParaRPr lang="ko-KR" altLang="en-US" sz="1300" dirty="0"/>
           </a:p>
@@ -5202,7 +5538,7 @@
                 <a:ea typeface="Pretendard" pitchFamily="34" charset="-122"/>
                 <a:cs typeface="Pretendard" pitchFamily="34" charset="-120"/>
               </a:rPr>
-              <a:t>실행할 때마다 최신 거래로 다시 계산하므로, 새 거래가 쌓이면 다시 실행하는 것만으로 반영됩니다</a:t>
+              <a:t>실행할 때마다 저장된 거래로 다시 계산하므로, 새 거래를 정제 데이터에 추가하고 다시 실행하면 반영됩니다</a:t>
             </a:r>
             <a:endParaRPr lang="ko-KR" altLang="en-US" sz="1500" dirty="0"/>
           </a:p>
@@ -11747,7 +12083,7 @@
                           <a:ea typeface="Pretendard" pitchFamily="34" charset="-122"/>
                           <a:cs typeface="Pretendard" pitchFamily="34" charset="-120"/>
                         </a:rPr>
-                        <a:t>마감·기준일 해석, 같은 호의 과거 거래 활용 방식</a:t>
+                        <a:t>마감·기준일 해석, 검증 물건의 과거 거래도 일반 비교사례로 사용(특정 물건 분기 금지)</a:t>
                       </a:r>
                       <a:endParaRPr lang="ko-KR" altLang="en-US" sz="1100" dirty="0">
                         <a:latin typeface="Pretendard" charset="0"/>
@@ -13480,7 +13816,7 @@
                 <a:ea typeface="Pretendard" pitchFamily="34" charset="-122"/>
                 <a:cs typeface="Pretendard" pitchFamily="34" charset="-120"/>
               </a:rPr>
-              <a:t>결정마다 선택지와 근거 기록(24건), 직접 확인 후 반영(PR 20건)</a:t>
+              <a:t>결정마다 선택지와 근거 기록(24건), 직접 확인 후 반영(PR 20건 이상)</a:t>
             </a:r>
             <a:endParaRPr lang="ko-KR" altLang="en-US" sz="1200" dirty="0"/>
           </a:p>
@@ -13633,7 +13969,7 @@
                 <a:ea typeface="Pretendard" pitchFamily="34" charset="-122"/>
                 <a:cs typeface="Pretendard" pitchFamily="34" charset="-120"/>
               </a:rPr>
-              <a:t>파이썬 5개월 차 기준 · 같은 범위 · 실제 소요 3일</a:t>
+              <a:t>본인 추정 · 파이썬 5개월 차 기준 · 같은 범위 · 실제 소요 3일</a:t>
             </a:r>
             <a:endParaRPr lang="ko-KR" altLang="en-US" sz="1100" dirty="0"/>
           </a:p>
@@ -13915,11 +14251,11 @@
         <p:spPr>
           <a:xfrm>
             <a:off x="548640" y="1600200"/>
-            <a:ext cx="5410048" cy="3657600"/>
+            <a:ext cx="5410048" cy="4343400"/>
           </a:xfrm>
           <a:prstGeom prst="roundRect">
             <a:avLst>
-              <a:gd name="adj" fmla="val 2000"/>
+              <a:gd name="adj" fmla="val 1684"/>
             </a:avLst>
           </a:prstGeom>
           <a:solidFill>
@@ -13984,7 +14320,7 @@
         <p:spPr>
           <a:xfrm>
             <a:off x="822960" y="2240280"/>
-            <a:ext cx="4861408" cy="2926080"/>
+            <a:ext cx="4861408" cy="3566160"/>
           </a:xfrm>
           <a:prstGeom prst="rect">
             <a:avLst/>
@@ -14015,7 +14351,7 @@
                 <a:ea typeface="Pretendard" pitchFamily="34" charset="-122"/>
                 <a:cs typeface="Pretendard" pitchFamily="34" charset="-120"/>
               </a:rPr>
-              <a:t>가족 간 거래·급매는 구별하지 못하고 신뢰도에도 반영하지 못함</a:t>
+              <a:t>직거래 등 사정이 있는 거래는 구별하지 못하고 신뢰도에도 반영하지 못함</a:t>
             </a:r>
             <a:endParaRPr lang="ko-KR" altLang="en-US" sz="1300" dirty="0"/>
           </a:p>
@@ -14163,6 +14499,30 @@
             </a:r>
             <a:endParaRPr lang="ko-KR" altLang="en-US" sz="1300" dirty="0"/>
           </a:p>
+          <a:p>
+            <a:pPr eaLnBrk="0" marL="177800" indent="-177800">
+              <a:lnSpc>
+                <a:spcPct val="120000"/>
+              </a:lnSpc>
+              <a:spcAft>
+                <a:spcPts val="600"/>
+              </a:spcAft>
+              <a:buSzPct val="100000"/>
+              <a:buChar char="•"/>
+            </a:pPr>
+            <a:r>
+              <a:rPr lang="ko-KR" altLang="en-US" sz="1300" dirty="0">
+                <a:solidFill>
+                  <a:srgbClr val="1F2328"/>
+                </a:solidFill>
+                <a:latin typeface="Pretendard" pitchFamily="34" charset="0"/>
+                <a:ea typeface="Pretendard" pitchFamily="34" charset="-122"/>
+                <a:cs typeface="Pretendard" pitchFamily="34" charset="-120"/>
+              </a:rPr>
+              <a:t>하우스머치 참고 비교 9건에서는 하우스머치가 실거래가에 더 가까웠음</a:t>
+            </a:r>
+            <a:endParaRPr lang="ko-KR" altLang="en-US" sz="1300" dirty="0"/>
+          </a:p>
         </p:txBody>
       </p:sp>
       <p:sp>
@@ -14174,11 +14534,11 @@
         <p:spPr>
           <a:xfrm>
             <a:off x="6233008" y="1600200"/>
-            <a:ext cx="5410048" cy="3657600"/>
+            <a:ext cx="5410048" cy="4343400"/>
           </a:xfrm>
           <a:prstGeom prst="roundRect">
             <a:avLst>
-              <a:gd name="adj" fmla="val 2000"/>
+              <a:gd name="adj" fmla="val 1684"/>
             </a:avLst>
           </a:prstGeom>
           <a:solidFill>
